--- a/chapter8/parts/part-06-version-control-tools/clip.pptx
+++ b/chapter8/parts/part-06-version-control-tools/clip.pptx
@@ -4326,10 +4326,12 @@
           </a:bodyPr>
           <a:lstStyle/>
           <a:p>
-            <a:pPr>
+            <a:pPr lvl="0" marL="457200" indent="-228600">
+              <a:buFont typeface="Calibri"/>
               <a:spcAft>
                 <a:spcPts val="1000"/>
               </a:spcAft>
+              <a:buSzPct val="100000"/>
               <a:buChar char="•"/>
               <a:lnSpc>
                 <a:spcPts val="2200"/>
@@ -4346,10 +4348,12 @@
             </a:r>
           </a:p>
           <a:p>
-            <a:pPr>
+            <a:pPr lvl="0" marL="457200" indent="-228600">
+              <a:buFont typeface="Calibri"/>
               <a:spcAft>
                 <a:spcPts val="1000"/>
               </a:spcAft>
+              <a:buSzPct val="100000"/>
               <a:buChar char="•"/>
               <a:lnSpc>
                 <a:spcPts val="2200"/>
@@ -4485,10 +4489,12 @@
           </a:bodyPr>
           <a:lstStyle/>
           <a:p>
-            <a:pPr>
+            <a:pPr lvl="0" marL="457200" indent="-228600">
+              <a:buFont typeface="Calibri"/>
               <a:spcAft>
                 <a:spcPts val="1000"/>
               </a:spcAft>
+              <a:buSzPct val="100000"/>
               <a:buChar char="•"/>
               <a:lnSpc>
                 <a:spcPts val="2200"/>
@@ -4624,10 +4630,12 @@
           </a:bodyPr>
           <a:lstStyle/>
           <a:p>
-            <a:pPr>
+            <a:pPr lvl="0" marL="457200" indent="-228600">
+              <a:buFont typeface="Calibri"/>
               <a:spcAft>
                 <a:spcPts val="1000"/>
               </a:spcAft>
+              <a:buSzPct val="100000"/>
               <a:buChar char="•"/>
               <a:lnSpc>
                 <a:spcPts val="2200"/>
@@ -4644,10 +4652,12 @@
             </a:r>
           </a:p>
           <a:p>
-            <a:pPr>
+            <a:pPr lvl="0" marL="457200" indent="-228600">
+              <a:buFont typeface="Calibri"/>
               <a:spcAft>
                 <a:spcPts val="1000"/>
               </a:spcAft>
+              <a:buSzPct val="100000"/>
               <a:buChar char="•"/>
               <a:lnSpc>
                 <a:spcPts val="2200"/>
@@ -4783,10 +4793,12 @@
           </a:bodyPr>
           <a:lstStyle/>
           <a:p>
-            <a:pPr>
+            <a:pPr lvl="0" marL="457200" indent="-228600">
+              <a:buFont typeface="Calibri"/>
               <a:spcAft>
                 <a:spcPts val="1000"/>
               </a:spcAft>
+              <a:buSzPct val="100000"/>
               <a:buChar char="•"/>
               <a:lnSpc>
                 <a:spcPts val="2200"/>
@@ -4803,10 +4815,12 @@
             </a:r>
           </a:p>
           <a:p>
-            <a:pPr>
+            <a:pPr lvl="0" marL="457200" indent="-228600">
+              <a:buFont typeface="Calibri"/>
               <a:spcAft>
                 <a:spcPts val="1000"/>
               </a:spcAft>
+              <a:buSzPct val="100000"/>
               <a:buChar char="•"/>
               <a:lnSpc>
                 <a:spcPts val="2200"/>
@@ -4823,10 +4837,12 @@
             </a:r>
           </a:p>
           <a:p>
-            <a:pPr>
+            <a:pPr lvl="0" marL="457200" indent="-228600">
+              <a:buFont typeface="Calibri"/>
               <a:spcAft>
                 <a:spcPts val="1000"/>
               </a:spcAft>
+              <a:buSzPct val="100000"/>
               <a:buChar char="•"/>
               <a:lnSpc>
                 <a:spcPts val="2200"/>
@@ -4843,10 +4859,12 @@
             </a:r>
           </a:p>
           <a:p>
-            <a:pPr>
+            <a:pPr lvl="0" marL="457200" indent="-228600">
+              <a:buFont typeface="Calibri"/>
               <a:spcAft>
                 <a:spcPts val="1000"/>
               </a:spcAft>
+              <a:buSzPct val="100000"/>
               <a:buChar char="•"/>
               <a:lnSpc>
                 <a:spcPts val="2200"/>
@@ -4863,10 +4881,12 @@
             </a:r>
           </a:p>
           <a:p>
-            <a:pPr>
+            <a:pPr lvl="0" marL="457200" indent="-228600">
+              <a:buFont typeface="Calibri"/>
               <a:spcAft>
                 <a:spcPts val="1000"/>
               </a:spcAft>
+              <a:buSzPct val="100000"/>
               <a:buChar char="•"/>
               <a:lnSpc>
                 <a:spcPts val="2200"/>
@@ -5002,10 +5022,12 @@
           </a:bodyPr>
           <a:lstStyle/>
           <a:p>
-            <a:pPr>
+            <a:pPr lvl="0" marL="457200" indent="-228600">
+              <a:buFont typeface="Calibri"/>
               <a:spcAft>
                 <a:spcPts val="1000"/>
               </a:spcAft>
+              <a:buSzPct val="100000"/>
               <a:buChar char="•"/>
               <a:lnSpc>
                 <a:spcPts val="2200"/>
@@ -5022,10 +5044,12 @@
             </a:r>
           </a:p>
           <a:p>
-            <a:pPr>
+            <a:pPr lvl="0" marL="457200" indent="-228600">
+              <a:buFont typeface="Calibri"/>
               <a:spcAft>
                 <a:spcPts val="1000"/>
               </a:spcAft>
+              <a:buSzPct val="100000"/>
               <a:buChar char="•"/>
               <a:lnSpc>
                 <a:spcPts val="2200"/>
@@ -5042,10 +5066,12 @@
             </a:r>
           </a:p>
           <a:p>
-            <a:pPr>
+            <a:pPr lvl="0" marL="457200" indent="-228600">
+              <a:buFont typeface="Calibri"/>
               <a:spcAft>
                 <a:spcPts val="1000"/>
               </a:spcAft>
+              <a:buSzPct val="100000"/>
               <a:buChar char="•"/>
               <a:lnSpc>
                 <a:spcPts val="2200"/>
@@ -5062,10 +5088,12 @@
             </a:r>
           </a:p>
           <a:p>
-            <a:pPr>
+            <a:pPr lvl="0" marL="457200" indent="-228600">
+              <a:buFont typeface="Calibri"/>
               <a:spcAft>
                 <a:spcPts val="1000"/>
               </a:spcAft>
+              <a:buSzPct val="100000"/>
               <a:buChar char="•"/>
               <a:lnSpc>
                 <a:spcPts val="2200"/>
@@ -5082,10 +5110,12 @@
             </a:r>
           </a:p>
           <a:p>
-            <a:pPr>
+            <a:pPr lvl="0" marL="457200" indent="-228600">
+              <a:buFont typeface="Calibri"/>
               <a:spcAft>
                 <a:spcPts val="1000"/>
               </a:spcAft>
+              <a:buSzPct val="100000"/>
               <a:buChar char="•"/>
               <a:lnSpc>
                 <a:spcPts val="2200"/>
@@ -5221,10 +5251,12 @@
           </a:bodyPr>
           <a:lstStyle/>
           <a:p>
-            <a:pPr>
+            <a:pPr lvl="0" marL="457200" indent="-228600">
+              <a:buFont typeface="Calibri"/>
               <a:spcAft>
                 <a:spcPts val="1000"/>
               </a:spcAft>
+              <a:buSzPct val="100000"/>
               <a:buChar char="•"/>
               <a:lnSpc>
                 <a:spcPts val="2200"/>
@@ -5241,10 +5273,12 @@
             </a:r>
           </a:p>
           <a:p>
-            <a:pPr>
+            <a:pPr lvl="0" marL="457200" indent="-228600">
+              <a:buFont typeface="Calibri"/>
               <a:spcAft>
                 <a:spcPts val="1000"/>
               </a:spcAft>
+              <a:buSzPct val="100000"/>
               <a:buChar char="•"/>
               <a:lnSpc>
                 <a:spcPts val="2200"/>
@@ -5261,10 +5295,12 @@
             </a:r>
           </a:p>
           <a:p>
-            <a:pPr>
+            <a:pPr lvl="0" marL="457200" indent="-228600">
+              <a:buFont typeface="Calibri"/>
               <a:spcAft>
                 <a:spcPts val="1000"/>
               </a:spcAft>
+              <a:buSzPct val="100000"/>
               <a:buChar char="•"/>
               <a:lnSpc>
                 <a:spcPts val="2200"/>
@@ -5400,10 +5436,12 @@
           </a:bodyPr>
           <a:lstStyle/>
           <a:p>
-            <a:pPr>
+            <a:pPr lvl="0" marL="457200" indent="-228600">
+              <a:buFont typeface="Calibri"/>
               <a:spcAft>
                 <a:spcPts val="1000"/>
               </a:spcAft>
+              <a:buSzPct val="100000"/>
               <a:buChar char="•"/>
               <a:lnSpc>
                 <a:spcPts val="2200"/>
@@ -5420,10 +5458,12 @@
             </a:r>
           </a:p>
           <a:p>
-            <a:pPr>
+            <a:pPr lvl="0" marL="457200" indent="-228600">
+              <a:buFont typeface="Calibri"/>
               <a:spcAft>
                 <a:spcPts val="1000"/>
               </a:spcAft>
+              <a:buSzPct val="100000"/>
               <a:buChar char="•"/>
               <a:lnSpc>
                 <a:spcPts val="2200"/>
@@ -5440,10 +5480,12 @@
             </a:r>
           </a:p>
           <a:p>
-            <a:pPr>
+            <a:pPr lvl="0" marL="457200" indent="-228600">
+              <a:buFont typeface="Calibri"/>
               <a:spcAft>
                 <a:spcPts val="1000"/>
               </a:spcAft>
+              <a:buSzPct val="100000"/>
               <a:buChar char="•"/>
               <a:lnSpc>
                 <a:spcPts val="2200"/>
@@ -5460,10 +5502,12 @@
             </a:r>
           </a:p>
           <a:p>
-            <a:pPr>
+            <a:pPr lvl="0" marL="457200" indent="-228600">
+              <a:buFont typeface="Calibri"/>
               <a:spcAft>
                 <a:spcPts val="1000"/>
               </a:spcAft>
+              <a:buSzPct val="100000"/>
               <a:buChar char="•"/>
               <a:lnSpc>
                 <a:spcPts val="2200"/>
@@ -5480,10 +5524,12 @@
             </a:r>
           </a:p>
           <a:p>
-            <a:pPr>
+            <a:pPr lvl="0" marL="457200" indent="-228600">
+              <a:buFont typeface="Calibri"/>
               <a:spcAft>
                 <a:spcPts val="1000"/>
               </a:spcAft>
+              <a:buSzPct val="100000"/>
               <a:buChar char="•"/>
               <a:lnSpc>
                 <a:spcPts val="2200"/>
@@ -5619,10 +5665,12 @@
           </a:bodyPr>
           <a:lstStyle/>
           <a:p>
-            <a:pPr>
+            <a:pPr lvl="0" marL="457200" indent="-228600">
+              <a:buFont typeface="Calibri"/>
               <a:spcAft>
                 <a:spcPts val="1000"/>
               </a:spcAft>
+              <a:buSzPct val="100000"/>
               <a:buChar char="•"/>
               <a:lnSpc>
                 <a:spcPts val="2200"/>
@@ -5639,10 +5687,12 @@
             </a:r>
           </a:p>
           <a:p>
-            <a:pPr>
+            <a:pPr lvl="0" marL="457200" indent="-228600">
+              <a:buFont typeface="Calibri"/>
               <a:spcAft>
                 <a:spcPts val="1000"/>
               </a:spcAft>
+              <a:buSzPct val="100000"/>
               <a:buChar char="•"/>
               <a:lnSpc>
                 <a:spcPts val="2200"/>
@@ -5778,10 +5828,12 @@
           </a:bodyPr>
           <a:lstStyle/>
           <a:p>
-            <a:pPr>
+            <a:pPr lvl="0" marL="457200" indent="-228600">
+              <a:buFont typeface="Calibri"/>
               <a:spcAft>
                 <a:spcPts val="1000"/>
               </a:spcAft>
+              <a:buSzPct val="100000"/>
               <a:buChar char="•"/>
               <a:lnSpc>
                 <a:spcPts val="2200"/>
@@ -5798,10 +5850,12 @@
             </a:r>
           </a:p>
           <a:p>
-            <a:pPr>
+            <a:pPr lvl="0" marL="457200" indent="-228600">
+              <a:buFont typeface="Calibri"/>
               <a:spcAft>
                 <a:spcPts val="1000"/>
               </a:spcAft>
+              <a:buSzPct val="100000"/>
               <a:buChar char="•"/>
               <a:lnSpc>
                 <a:spcPts val="2200"/>
@@ -5818,10 +5872,12 @@
             </a:r>
           </a:p>
           <a:p>
-            <a:pPr>
+            <a:pPr lvl="0" marL="457200" indent="-228600">
+              <a:buFont typeface="Calibri"/>
               <a:spcAft>
                 <a:spcPts val="1000"/>
               </a:spcAft>
+              <a:buSzPct val="100000"/>
               <a:buChar char="•"/>
               <a:lnSpc>
                 <a:spcPts val="2200"/>
